--- a/tutorial/T01/tut01.pptx
+++ b/tutorial/T01/tut01.pptx
@@ -186,30 +186,6 @@
           <ac:spMkLst>
             <pc:docMk/>
             <pc:sldMk cId="1871005255" sldId="270"/>
-            <ac:spMk id="3" creationId="{8F20472D-613F-3748-9CBD-88055CDB4B08}"/>
-          </ac:spMkLst>
-        </pc:spChg>
-      </pc:sldChg>
-    </pc:docChg>
-  </pc:docChgLst>
-  <pc:docChgLst>
-    <pc:chgData name="Qingyu Song" userId="O4NG2utMRSC9bShTQouuMd1Uq3x00QhxVtEheGSGOoU=" providerId="None" clId="Web-{1A9491C6-FD31-4FA7-98FA-39E25D0B6578}"/>
-    <pc:docChg chg="modSld">
-      <pc:chgData name="Qingyu Song" userId="O4NG2utMRSC9bShTQouuMd1Uq3x00QhxVtEheGSGOoU=" providerId="None" clId="Web-{1A9491C6-FD31-4FA7-98FA-39E25D0B6578}" dt="2022-01-09T11:29:04.756" v="11" actId="20577"/>
-      <pc:docMkLst>
-        <pc:docMk/>
-      </pc:docMkLst>
-      <pc:sldChg chg="modSp">
-        <pc:chgData name="Qingyu Song" userId="O4NG2utMRSC9bShTQouuMd1Uq3x00QhxVtEheGSGOoU=" providerId="None" clId="Web-{1A9491C6-FD31-4FA7-98FA-39E25D0B6578}" dt="2022-01-09T11:29:04.756" v="11" actId="20577"/>
-        <pc:sldMkLst>
-          <pc:docMk/>
-          <pc:sldMk cId="1947847713" sldId="257"/>
-        </pc:sldMkLst>
-        <pc:spChg chg="mod">
-          <ac:chgData name="Qingyu Song" userId="O4NG2utMRSC9bShTQouuMd1Uq3x00QhxVtEheGSGOoU=" providerId="None" clId="Web-{1A9491C6-FD31-4FA7-98FA-39E25D0B6578}" dt="2022-01-09T11:29:04.756" v="11" actId="20577"/>
-          <ac:spMkLst>
-            <pc:docMk/>
-            <pc:sldMk cId="1947847713" sldId="257"/>
             <ac:spMk id="3" creationId="{8F20472D-613F-3748-9CBD-88055CDB4B08}"/>
           </ac:spMkLst>
         </pc:spChg>
@@ -861,6 +837,30 @@
     </pc:docChg>
   </pc:docChgLst>
   <pc:docChgLst>
+    <pc:chgData name="Qingyu Song" userId="O4NG2utMRSC9bShTQouuMd1Uq3x00QhxVtEheGSGOoU=" providerId="None" clId="Web-{1A9491C6-FD31-4FA7-98FA-39E25D0B6578}"/>
+    <pc:docChg chg="modSld">
+      <pc:chgData name="Qingyu Song" userId="O4NG2utMRSC9bShTQouuMd1Uq3x00QhxVtEheGSGOoU=" providerId="None" clId="Web-{1A9491C6-FD31-4FA7-98FA-39E25D0B6578}" dt="2022-01-09T11:29:04.756" v="11" actId="20577"/>
+      <pc:docMkLst>
+        <pc:docMk/>
+      </pc:docMkLst>
+      <pc:sldChg chg="modSp">
+        <pc:chgData name="Qingyu Song" userId="O4NG2utMRSC9bShTQouuMd1Uq3x00QhxVtEheGSGOoU=" providerId="None" clId="Web-{1A9491C6-FD31-4FA7-98FA-39E25D0B6578}" dt="2022-01-09T11:29:04.756" v="11" actId="20577"/>
+        <pc:sldMkLst>
+          <pc:docMk/>
+          <pc:sldMk cId="1947847713" sldId="257"/>
+        </pc:sldMkLst>
+        <pc:spChg chg="mod">
+          <ac:chgData name="Qingyu Song" userId="O4NG2utMRSC9bShTQouuMd1Uq3x00QhxVtEheGSGOoU=" providerId="None" clId="Web-{1A9491C6-FD31-4FA7-98FA-39E25D0B6578}" dt="2022-01-09T11:29:04.756" v="11" actId="20577"/>
+          <ac:spMkLst>
+            <pc:docMk/>
+            <pc:sldMk cId="1947847713" sldId="257"/>
+            <ac:spMk id="3" creationId="{8F20472D-613F-3748-9CBD-88055CDB4B08}"/>
+          </ac:spMkLst>
+        </pc:spChg>
+      </pc:sldChg>
+    </pc:docChg>
+  </pc:docChgLst>
+  <pc:docChgLst>
     <pc:chgData name="FENG, Yicheng" userId="63ae093e-9cad-467c-bb2d-e823331db8b5" providerId="ADAL" clId="{B898DADE-9C35-46BD-A02D-0FAA454B61CB}"/>
     <pc:docChg chg="undo custSel addSld modSld sldOrd">
       <pc:chgData name="FENG, Yicheng" userId="63ae093e-9cad-467c-bb2d-e823331db8b5" providerId="ADAL" clId="{B898DADE-9C35-46BD-A02D-0FAA454B61CB}" dt="2025-01-06T12:27:01.730" v="695" actId="113"/>
@@ -1628,7 +1628,7 @@
           <a:p>
             <a:fld id="{2425905D-C0C4-D040-B3F5-79CCA23FA4EB}" type="datetimeFigureOut">
               <a:rPr lang="en-US" smtClean="0"/>
-              <a:t>1/6/2025</a:t>
+              <a:t>1/7/25</a:t>
             </a:fld>
             <a:endParaRPr lang="en-US"/>
           </a:p>
@@ -1828,7 +1828,7 @@
           <a:p>
             <a:fld id="{2425905D-C0C4-D040-B3F5-79CCA23FA4EB}" type="datetimeFigureOut">
               <a:rPr lang="en-US" smtClean="0"/>
-              <a:t>1/6/2025</a:t>
+              <a:t>1/7/25</a:t>
             </a:fld>
             <a:endParaRPr lang="en-US"/>
           </a:p>
@@ -2038,7 +2038,7 @@
           <a:p>
             <a:fld id="{2425905D-C0C4-D040-B3F5-79CCA23FA4EB}" type="datetimeFigureOut">
               <a:rPr lang="en-US" smtClean="0"/>
-              <a:t>1/6/2025</a:t>
+              <a:t>1/7/25</a:t>
             </a:fld>
             <a:endParaRPr lang="en-US"/>
           </a:p>
@@ -2238,7 +2238,7 @@
           <a:p>
             <a:fld id="{2425905D-C0C4-D040-B3F5-79CCA23FA4EB}" type="datetimeFigureOut">
               <a:rPr lang="en-US" smtClean="0"/>
-              <a:t>1/6/2025</a:t>
+              <a:t>1/7/25</a:t>
             </a:fld>
             <a:endParaRPr lang="en-US"/>
           </a:p>
@@ -2514,7 +2514,7 @@
           <a:p>
             <a:fld id="{2425905D-C0C4-D040-B3F5-79CCA23FA4EB}" type="datetimeFigureOut">
               <a:rPr lang="en-US" smtClean="0"/>
-              <a:t>1/6/2025</a:t>
+              <a:t>1/7/25</a:t>
             </a:fld>
             <a:endParaRPr lang="en-US"/>
           </a:p>
@@ -2782,7 +2782,7 @@
           <a:p>
             <a:fld id="{2425905D-C0C4-D040-B3F5-79CCA23FA4EB}" type="datetimeFigureOut">
               <a:rPr lang="en-US" smtClean="0"/>
-              <a:t>1/6/2025</a:t>
+              <a:t>1/7/25</a:t>
             </a:fld>
             <a:endParaRPr lang="en-US"/>
           </a:p>
@@ -3197,7 +3197,7 @@
           <a:p>
             <a:fld id="{2425905D-C0C4-D040-B3F5-79CCA23FA4EB}" type="datetimeFigureOut">
               <a:rPr lang="en-US" smtClean="0"/>
-              <a:t>1/6/2025</a:t>
+              <a:t>1/7/25</a:t>
             </a:fld>
             <a:endParaRPr lang="en-US"/>
           </a:p>
@@ -3339,7 +3339,7 @@
           <a:p>
             <a:fld id="{2425905D-C0C4-D040-B3F5-79CCA23FA4EB}" type="datetimeFigureOut">
               <a:rPr lang="en-US" smtClean="0"/>
-              <a:t>1/6/2025</a:t>
+              <a:t>1/7/25</a:t>
             </a:fld>
             <a:endParaRPr lang="en-US"/>
           </a:p>
@@ -3452,7 +3452,7 @@
           <a:p>
             <a:fld id="{2425905D-C0C4-D040-B3F5-79CCA23FA4EB}" type="datetimeFigureOut">
               <a:rPr lang="en-US" smtClean="0"/>
-              <a:t>1/6/2025</a:t>
+              <a:t>1/7/25</a:t>
             </a:fld>
             <a:endParaRPr lang="en-US"/>
           </a:p>
@@ -3765,7 +3765,7 @@
           <a:p>
             <a:fld id="{2425905D-C0C4-D040-B3F5-79CCA23FA4EB}" type="datetimeFigureOut">
               <a:rPr lang="en-US" smtClean="0"/>
-              <a:t>1/6/2025</a:t>
+              <a:t>1/7/25</a:t>
             </a:fld>
             <a:endParaRPr lang="en-US"/>
           </a:p>
@@ -4054,7 +4054,7 @@
           <a:p>
             <a:fld id="{2425905D-C0C4-D040-B3F5-79CCA23FA4EB}" type="datetimeFigureOut">
               <a:rPr lang="en-US" smtClean="0"/>
-              <a:t>1/6/2025</a:t>
+              <a:t>1/7/25</a:t>
             </a:fld>
             <a:endParaRPr lang="en-US"/>
           </a:p>
@@ -4297,7 +4297,7 @@
           <a:p>
             <a:fld id="{2425905D-C0C4-D040-B3F5-79CCA23FA4EB}" type="datetimeFigureOut">
               <a:rPr lang="en-US" smtClean="0"/>
-              <a:t>1/6/2025</a:t>
+              <a:t>1/7/25</a:t>
             </a:fld>
             <a:endParaRPr lang="en-US"/>
           </a:p>
@@ -11323,7 +11323,7 @@
             </a:r>
             <a:r>
               <a:rPr lang="en-US" altLang="zh-CN" sz="4000" b="1" dirty="0"/>
-              <a:t>elcome to CSCI4430-ESTR4120, Computer Networks!</a:t>
+              <a:t>elcome to CSCI4430, Computer Networks!</a:t>
             </a:r>
             <a:endParaRPr lang="en-US" sz="4000" b="1" dirty="0"/>
           </a:p>
@@ -12596,7 +12596,23 @@
             </a:r>
             <a:r>
               <a:rPr lang="en-HK" dirty="0"/>
-              <a:t>11:59:59 p.m., Sat, Feb. 8th</a:t>
+              <a:t>11:59:59 p.m., Sat, J</a:t>
+            </a:r>
+            <a:r>
+              <a:rPr lang="en-US" altLang="zh-CN" dirty="0"/>
+              <a:t>an</a:t>
+            </a:r>
+            <a:r>
+              <a:rPr lang="en-HK" dirty="0"/>
+              <a:t>. </a:t>
+            </a:r>
+            <a:r>
+              <a:rPr lang="en-US" altLang="zh-CN" dirty="0"/>
+              <a:t>25</a:t>
+            </a:r>
+            <a:r>
+              <a:rPr lang="en-HK" dirty="0" err="1"/>
+              <a:t>th</a:t>
             </a:r>
             <a:endParaRPr lang="en-US" dirty="0"/>
           </a:p>
@@ -14196,7 +14212,7 @@
             </a:ln>
             <a:extLst>
               <a:ext uri="{91240B29-F687-4f45-9708-019B960494DF}">
-                <a14:hiddenLine xmlns="" xmlns:a14="http://schemas.microsoft.com/office/drawing/2010/main" w="12700">
+                <a14:hiddenLine xmlns:a14="http://schemas.microsoft.com/office/drawing/2010/main" xmlns="" w="12700">
                   <a:solidFill>
                     <a:schemeClr val="tx1"/>
                   </a:solidFill>
@@ -14340,7 +14356,7 @@
             </a:ln>
             <a:extLst>
               <a:ext uri="{91240B29-F687-4f45-9708-019B960494DF}">
-                <a14:hiddenLine xmlns="" xmlns:a14="http://schemas.microsoft.com/office/drawing/2010/main" w="12700">
+                <a14:hiddenLine xmlns:a14="http://schemas.microsoft.com/office/drawing/2010/main" xmlns="" w="12700">
                   <a:solidFill>
                     <a:schemeClr val="tx1"/>
                   </a:solidFill>
@@ -14484,7 +14500,7 @@
             </a:ln>
             <a:extLst>
               <a:ext uri="{91240B29-F687-4f45-9708-019B960494DF}">
-                <a14:hiddenLine xmlns="" xmlns:a14="http://schemas.microsoft.com/office/drawing/2010/main" w="12700">
+                <a14:hiddenLine xmlns:a14="http://schemas.microsoft.com/office/drawing/2010/main" xmlns="" w="12700">
                   <a:solidFill>
                     <a:schemeClr val="tx1"/>
                   </a:solidFill>
@@ -14628,7 +14644,7 @@
             </a:ln>
             <a:extLst>
               <a:ext uri="{91240B29-F687-4f45-9708-019B960494DF}">
-                <a14:hiddenLine xmlns="" xmlns:a14="http://schemas.microsoft.com/office/drawing/2010/main" w="12700">
+                <a14:hiddenLine xmlns:a14="http://schemas.microsoft.com/office/drawing/2010/main" xmlns="" w="12700">
                   <a:solidFill>
                     <a:schemeClr val="tx1"/>
                   </a:solidFill>
@@ -14772,14 +14788,14 @@
             </a:ln>
             <a:extLst>
               <a:ext uri="{909E8E84-426E-40dd-AFC4-6F175D3DCCD1}">
-                <a14:hiddenFill xmlns="" xmlns:a14="http://schemas.microsoft.com/office/drawing/2010/main">
+                <a14:hiddenFill xmlns:a14="http://schemas.microsoft.com/office/drawing/2010/main" xmlns="">
                   <a:solidFill>
                     <a:srgbClr val="FFFFFF"/>
                   </a:solidFill>
                 </a14:hiddenFill>
               </a:ext>
               <a:ext uri="{91240B29-F687-4f45-9708-019B960494DF}">
-                <a14:hiddenLine xmlns="" xmlns:a14="http://schemas.microsoft.com/office/drawing/2010/main" w="12700">
+                <a14:hiddenLine xmlns:a14="http://schemas.microsoft.com/office/drawing/2010/main" xmlns="" w="12700">
                   <a:solidFill>
                     <a:schemeClr val="tx1"/>
                   </a:solidFill>
@@ -14921,14 +14937,14 @@
             </a:ln>
             <a:extLst>
               <a:ext uri="{909E8E84-426E-40dd-AFC4-6F175D3DCCD1}">
-                <a14:hiddenFill xmlns="" xmlns:a14="http://schemas.microsoft.com/office/drawing/2010/main">
+                <a14:hiddenFill xmlns:a14="http://schemas.microsoft.com/office/drawing/2010/main" xmlns="">
                   <a:solidFill>
                     <a:srgbClr val="FFFFFF"/>
                   </a:solidFill>
                 </a14:hiddenFill>
               </a:ext>
               <a:ext uri="{91240B29-F687-4f45-9708-019B960494DF}">
-                <a14:hiddenLine xmlns="" xmlns:a14="http://schemas.microsoft.com/office/drawing/2010/main" w="12700">
+                <a14:hiddenLine xmlns:a14="http://schemas.microsoft.com/office/drawing/2010/main" xmlns="" w="12700">
                   <a:solidFill>
                     <a:schemeClr val="tx1"/>
                   </a:solidFill>
@@ -15070,14 +15086,14 @@
             </a:ln>
             <a:extLst>
               <a:ext uri="{909E8E84-426E-40dd-AFC4-6F175D3DCCD1}">
-                <a14:hiddenFill xmlns="" xmlns:a14="http://schemas.microsoft.com/office/drawing/2010/main">
+                <a14:hiddenFill xmlns:a14="http://schemas.microsoft.com/office/drawing/2010/main" xmlns="">
                   <a:solidFill>
                     <a:srgbClr val="FFFFFF"/>
                   </a:solidFill>
                 </a14:hiddenFill>
               </a:ext>
               <a:ext uri="{91240B29-F687-4f45-9708-019B960494DF}">
-                <a14:hiddenLine xmlns="" xmlns:a14="http://schemas.microsoft.com/office/drawing/2010/main" w="12700">
+                <a14:hiddenLine xmlns:a14="http://schemas.microsoft.com/office/drawing/2010/main" xmlns="" w="12700">
                   <a:solidFill>
                     <a:schemeClr val="tx1"/>
                   </a:solidFill>
@@ -15349,7 +15365,7 @@
           </a:ln>
           <a:extLst>
             <a:ext uri="{909E8E84-426E-40dd-AFC4-6F175D3DCCD1}">
-              <a14:hiddenFill xmlns="" xmlns:a14="http://schemas.microsoft.com/office/drawing/2010/main">
+              <a14:hiddenFill xmlns:a14="http://schemas.microsoft.com/office/drawing/2010/main" xmlns="">
                 <a:noFill/>
               </a14:hiddenFill>
             </a:ext>
@@ -15390,7 +15406,7 @@
           </a:ln>
           <a:extLst>
             <a:ext uri="{909E8E84-426E-40dd-AFC4-6F175D3DCCD1}">
-              <a14:hiddenFill xmlns="" xmlns:a14="http://schemas.microsoft.com/office/drawing/2010/main">
+              <a14:hiddenFill xmlns:a14="http://schemas.microsoft.com/office/drawing/2010/main" xmlns="">
                 <a:noFill/>
               </a14:hiddenFill>
             </a:ext>
@@ -15431,7 +15447,7 @@
           </a:ln>
           <a:extLst>
             <a:ext uri="{909E8E84-426E-40dd-AFC4-6F175D3DCCD1}">
-              <a14:hiddenFill xmlns="" xmlns:a14="http://schemas.microsoft.com/office/drawing/2010/main">
+              <a14:hiddenFill xmlns:a14="http://schemas.microsoft.com/office/drawing/2010/main" xmlns="">
                 <a:noFill/>
               </a14:hiddenFill>
             </a:ext>
@@ -15472,7 +15488,7 @@
           </a:ln>
           <a:extLst>
             <a:ext uri="{909E8E84-426E-40dd-AFC4-6F175D3DCCD1}">
-              <a14:hiddenFill xmlns="" xmlns:a14="http://schemas.microsoft.com/office/drawing/2010/main">
+              <a14:hiddenFill xmlns:a14="http://schemas.microsoft.com/office/drawing/2010/main" xmlns="">
                 <a:noFill/>
               </a14:hiddenFill>
             </a:ext>
@@ -15513,7 +15529,7 @@
           </a:ln>
           <a:extLst>
             <a:ext uri="{909E8E84-426E-40dd-AFC4-6F175D3DCCD1}">
-              <a14:hiddenFill xmlns="" xmlns:a14="http://schemas.microsoft.com/office/drawing/2010/main">
+              <a14:hiddenFill xmlns:a14="http://schemas.microsoft.com/office/drawing/2010/main" xmlns="">
                 <a:noFill/>
               </a14:hiddenFill>
             </a:ext>
@@ -15629,7 +15645,7 @@
             </a:ln>
             <a:extLst>
               <a:ext uri="{91240B29-F687-4f45-9708-019B960494DF}">
-                <a14:hiddenLine xmlns="" xmlns:a14="http://schemas.microsoft.com/office/drawing/2010/main" w="12700">
+                <a14:hiddenLine xmlns:a14="http://schemas.microsoft.com/office/drawing/2010/main" xmlns="" w="12700">
                   <a:solidFill>
                     <a:schemeClr val="tx1"/>
                   </a:solidFill>
@@ -15773,7 +15789,7 @@
             </a:ln>
             <a:extLst>
               <a:ext uri="{91240B29-F687-4f45-9708-019B960494DF}">
-                <a14:hiddenLine xmlns="" xmlns:a14="http://schemas.microsoft.com/office/drawing/2010/main" w="12700">
+                <a14:hiddenLine xmlns:a14="http://schemas.microsoft.com/office/drawing/2010/main" xmlns="" w="12700">
                   <a:solidFill>
                     <a:schemeClr val="tx1"/>
                   </a:solidFill>
@@ -15917,14 +15933,14 @@
             </a:ln>
             <a:extLst>
               <a:ext uri="{909E8E84-426E-40dd-AFC4-6F175D3DCCD1}">
-                <a14:hiddenFill xmlns="" xmlns:a14="http://schemas.microsoft.com/office/drawing/2010/main">
+                <a14:hiddenFill xmlns:a14="http://schemas.microsoft.com/office/drawing/2010/main" xmlns="">
                   <a:solidFill>
                     <a:srgbClr val="FFFFFF"/>
                   </a:solidFill>
                 </a14:hiddenFill>
               </a:ext>
               <a:ext uri="{91240B29-F687-4f45-9708-019B960494DF}">
-                <a14:hiddenLine xmlns="" xmlns:a14="http://schemas.microsoft.com/office/drawing/2010/main" w="12700">
+                <a14:hiddenLine xmlns:a14="http://schemas.microsoft.com/office/drawing/2010/main" xmlns="" w="12700">
                   <a:solidFill>
                     <a:schemeClr val="tx1"/>
                   </a:solidFill>
@@ -16066,14 +16082,14 @@
             </a:ln>
             <a:extLst>
               <a:ext uri="{909E8E84-426E-40dd-AFC4-6F175D3DCCD1}">
-                <a14:hiddenFill xmlns="" xmlns:a14="http://schemas.microsoft.com/office/drawing/2010/main">
+                <a14:hiddenFill xmlns:a14="http://schemas.microsoft.com/office/drawing/2010/main" xmlns="">
                   <a:solidFill>
                     <a:srgbClr val="FFFFFF"/>
                   </a:solidFill>
                 </a14:hiddenFill>
               </a:ext>
               <a:ext uri="{91240B29-F687-4f45-9708-019B960494DF}">
-                <a14:hiddenLine xmlns="" xmlns:a14="http://schemas.microsoft.com/office/drawing/2010/main" w="12700">
+                <a14:hiddenLine xmlns:a14="http://schemas.microsoft.com/office/drawing/2010/main" xmlns="" w="12700">
                   <a:solidFill>
                     <a:schemeClr val="tx1"/>
                   </a:solidFill>
@@ -16215,14 +16231,14 @@
             </a:ln>
             <a:extLst>
               <a:ext uri="{909E8E84-426E-40dd-AFC4-6F175D3DCCD1}">
-                <a14:hiddenFill xmlns="" xmlns:a14="http://schemas.microsoft.com/office/drawing/2010/main">
+                <a14:hiddenFill xmlns:a14="http://schemas.microsoft.com/office/drawing/2010/main" xmlns="">
                   <a:solidFill>
                     <a:srgbClr val="FFFFFF"/>
                   </a:solidFill>
                 </a14:hiddenFill>
               </a:ext>
               <a:ext uri="{91240B29-F687-4f45-9708-019B960494DF}">
-                <a14:hiddenLine xmlns="" xmlns:a14="http://schemas.microsoft.com/office/drawing/2010/main" w="12700">
+                <a14:hiddenLine xmlns:a14="http://schemas.microsoft.com/office/drawing/2010/main" xmlns="" w="12700">
                   <a:solidFill>
                     <a:schemeClr val="tx1"/>
                   </a:solidFill>

--- a/tutorial/T01/tut01.pptx
+++ b/tutorial/T01/tut01.pptx
@@ -1629,7 +1629,7 @@
           <a:p>
             <a:fld id="{2425905D-C0C4-D040-B3F5-79CCA23FA4EB}" type="datetimeFigureOut">
               <a:rPr lang="en-US" smtClean="0"/>
-              <a:t>1/13/2025</a:t>
+              <a:t>1/16/2025</a:t>
             </a:fld>
             <a:endParaRPr lang="en-US"/>
           </a:p>
@@ -1829,7 +1829,7 @@
           <a:p>
             <a:fld id="{2425905D-C0C4-D040-B3F5-79CCA23FA4EB}" type="datetimeFigureOut">
               <a:rPr lang="en-US" smtClean="0"/>
-              <a:t>1/13/2025</a:t>
+              <a:t>1/16/2025</a:t>
             </a:fld>
             <a:endParaRPr lang="en-US"/>
           </a:p>
@@ -2039,7 +2039,7 @@
           <a:p>
             <a:fld id="{2425905D-C0C4-D040-B3F5-79CCA23FA4EB}" type="datetimeFigureOut">
               <a:rPr lang="en-US" smtClean="0"/>
-              <a:t>1/13/2025</a:t>
+              <a:t>1/16/2025</a:t>
             </a:fld>
             <a:endParaRPr lang="en-US"/>
           </a:p>
@@ -2239,7 +2239,7 @@
           <a:p>
             <a:fld id="{2425905D-C0C4-D040-B3F5-79CCA23FA4EB}" type="datetimeFigureOut">
               <a:rPr lang="en-US" smtClean="0"/>
-              <a:t>1/13/2025</a:t>
+              <a:t>1/16/2025</a:t>
             </a:fld>
             <a:endParaRPr lang="en-US"/>
           </a:p>
@@ -2515,7 +2515,7 @@
           <a:p>
             <a:fld id="{2425905D-C0C4-D040-B3F5-79CCA23FA4EB}" type="datetimeFigureOut">
               <a:rPr lang="en-US" smtClean="0"/>
-              <a:t>1/13/2025</a:t>
+              <a:t>1/16/2025</a:t>
             </a:fld>
             <a:endParaRPr lang="en-US"/>
           </a:p>
@@ -2783,7 +2783,7 @@
           <a:p>
             <a:fld id="{2425905D-C0C4-D040-B3F5-79CCA23FA4EB}" type="datetimeFigureOut">
               <a:rPr lang="en-US" smtClean="0"/>
-              <a:t>1/13/2025</a:t>
+              <a:t>1/16/2025</a:t>
             </a:fld>
             <a:endParaRPr lang="en-US"/>
           </a:p>
@@ -3198,7 +3198,7 @@
           <a:p>
             <a:fld id="{2425905D-C0C4-D040-B3F5-79CCA23FA4EB}" type="datetimeFigureOut">
               <a:rPr lang="en-US" smtClean="0"/>
-              <a:t>1/13/2025</a:t>
+              <a:t>1/16/2025</a:t>
             </a:fld>
             <a:endParaRPr lang="en-US"/>
           </a:p>
@@ -3340,7 +3340,7 @@
           <a:p>
             <a:fld id="{2425905D-C0C4-D040-B3F5-79CCA23FA4EB}" type="datetimeFigureOut">
               <a:rPr lang="en-US" smtClean="0"/>
-              <a:t>1/13/2025</a:t>
+              <a:t>1/16/2025</a:t>
             </a:fld>
             <a:endParaRPr lang="en-US"/>
           </a:p>
@@ -3453,7 +3453,7 @@
           <a:p>
             <a:fld id="{2425905D-C0C4-D040-B3F5-79CCA23FA4EB}" type="datetimeFigureOut">
               <a:rPr lang="en-US" smtClean="0"/>
-              <a:t>1/13/2025</a:t>
+              <a:t>1/16/2025</a:t>
             </a:fld>
             <a:endParaRPr lang="en-US"/>
           </a:p>
@@ -3766,7 +3766,7 @@
           <a:p>
             <a:fld id="{2425905D-C0C4-D040-B3F5-79CCA23FA4EB}" type="datetimeFigureOut">
               <a:rPr lang="en-US" smtClean="0"/>
-              <a:t>1/13/2025</a:t>
+              <a:t>1/16/2025</a:t>
             </a:fld>
             <a:endParaRPr lang="en-US"/>
           </a:p>
@@ -4055,7 +4055,7 @@
           <a:p>
             <a:fld id="{2425905D-C0C4-D040-B3F5-79CCA23FA4EB}" type="datetimeFigureOut">
               <a:rPr lang="en-US" smtClean="0"/>
-              <a:t>1/13/2025</a:t>
+              <a:t>1/16/2025</a:t>
             </a:fld>
             <a:endParaRPr lang="en-US"/>
           </a:p>
@@ -4298,7 +4298,7 @@
           <a:p>
             <a:fld id="{2425905D-C0C4-D040-B3F5-79CCA23FA4EB}" type="datetimeFigureOut">
               <a:rPr lang="en-US" smtClean="0"/>
-              <a:t>1/13/2025</a:t>
+              <a:t>1/16/2025</a:t>
             </a:fld>
             <a:endParaRPr lang="en-US"/>
           </a:p>
@@ -5032,7 +5032,7 @@
             </a:ln>
             <a:extLst>
               <a:ext uri="{91240B29-F687-4f45-9708-019B960494DF}">
-                <a14:hiddenLine xmlns="" xmlns:a14="http://schemas.microsoft.com/office/drawing/2010/main" w="12700">
+                <a14:hiddenLine xmlns:a14="http://schemas.microsoft.com/office/drawing/2010/main" xmlns="" w="12700">
                   <a:solidFill>
                     <a:schemeClr val="tx1"/>
                   </a:solidFill>
@@ -5176,7 +5176,7 @@
             </a:ln>
             <a:extLst>
               <a:ext uri="{91240B29-F687-4f45-9708-019B960494DF}">
-                <a14:hiddenLine xmlns="" xmlns:a14="http://schemas.microsoft.com/office/drawing/2010/main" w="12700">
+                <a14:hiddenLine xmlns:a14="http://schemas.microsoft.com/office/drawing/2010/main" xmlns="" w="12700">
                   <a:solidFill>
                     <a:schemeClr val="tx1"/>
                   </a:solidFill>
@@ -5320,7 +5320,7 @@
             </a:ln>
             <a:extLst>
               <a:ext uri="{91240B29-F687-4f45-9708-019B960494DF}">
-                <a14:hiddenLine xmlns="" xmlns:a14="http://schemas.microsoft.com/office/drawing/2010/main" w="12700">
+                <a14:hiddenLine xmlns:a14="http://schemas.microsoft.com/office/drawing/2010/main" xmlns="" w="12700">
                   <a:solidFill>
                     <a:schemeClr val="tx1"/>
                   </a:solidFill>
@@ -5464,7 +5464,7 @@
             </a:ln>
             <a:extLst>
               <a:ext uri="{91240B29-F687-4f45-9708-019B960494DF}">
-                <a14:hiddenLine xmlns="" xmlns:a14="http://schemas.microsoft.com/office/drawing/2010/main" w="12700">
+                <a14:hiddenLine xmlns:a14="http://schemas.microsoft.com/office/drawing/2010/main" xmlns="" w="12700">
                   <a:solidFill>
                     <a:schemeClr val="tx1"/>
                   </a:solidFill>
@@ -5608,14 +5608,14 @@
             </a:ln>
             <a:extLst>
               <a:ext uri="{909E8E84-426E-40dd-AFC4-6F175D3DCCD1}">
-                <a14:hiddenFill xmlns="" xmlns:a14="http://schemas.microsoft.com/office/drawing/2010/main">
+                <a14:hiddenFill xmlns:a14="http://schemas.microsoft.com/office/drawing/2010/main" xmlns="">
                   <a:solidFill>
                     <a:srgbClr val="FFFFFF"/>
                   </a:solidFill>
                 </a14:hiddenFill>
               </a:ext>
               <a:ext uri="{91240B29-F687-4f45-9708-019B960494DF}">
-                <a14:hiddenLine xmlns="" xmlns:a14="http://schemas.microsoft.com/office/drawing/2010/main" w="12700">
+                <a14:hiddenLine xmlns:a14="http://schemas.microsoft.com/office/drawing/2010/main" xmlns="" w="12700">
                   <a:solidFill>
                     <a:schemeClr val="tx1"/>
                   </a:solidFill>
@@ -5757,14 +5757,14 @@
             </a:ln>
             <a:extLst>
               <a:ext uri="{909E8E84-426E-40dd-AFC4-6F175D3DCCD1}">
-                <a14:hiddenFill xmlns="" xmlns:a14="http://schemas.microsoft.com/office/drawing/2010/main">
+                <a14:hiddenFill xmlns:a14="http://schemas.microsoft.com/office/drawing/2010/main" xmlns="">
                   <a:solidFill>
                     <a:srgbClr val="FFFFFF"/>
                   </a:solidFill>
                 </a14:hiddenFill>
               </a:ext>
               <a:ext uri="{91240B29-F687-4f45-9708-019B960494DF}">
-                <a14:hiddenLine xmlns="" xmlns:a14="http://schemas.microsoft.com/office/drawing/2010/main" w="12700">
+                <a14:hiddenLine xmlns:a14="http://schemas.microsoft.com/office/drawing/2010/main" xmlns="" w="12700">
                   <a:solidFill>
                     <a:schemeClr val="tx1"/>
                   </a:solidFill>
@@ -5906,14 +5906,14 @@
             </a:ln>
             <a:extLst>
               <a:ext uri="{909E8E84-426E-40dd-AFC4-6F175D3DCCD1}">
-                <a14:hiddenFill xmlns="" xmlns:a14="http://schemas.microsoft.com/office/drawing/2010/main">
+                <a14:hiddenFill xmlns:a14="http://schemas.microsoft.com/office/drawing/2010/main" xmlns="">
                   <a:solidFill>
                     <a:srgbClr val="FFFFFF"/>
                   </a:solidFill>
                 </a14:hiddenFill>
               </a:ext>
               <a:ext uri="{91240B29-F687-4f45-9708-019B960494DF}">
-                <a14:hiddenLine xmlns="" xmlns:a14="http://schemas.microsoft.com/office/drawing/2010/main" w="12700">
+                <a14:hiddenLine xmlns:a14="http://schemas.microsoft.com/office/drawing/2010/main" xmlns="" w="12700">
                   <a:solidFill>
                     <a:schemeClr val="tx1"/>
                   </a:solidFill>
@@ -6185,7 +6185,7 @@
           </a:ln>
           <a:extLst>
             <a:ext uri="{909E8E84-426E-40dd-AFC4-6F175D3DCCD1}">
-              <a14:hiddenFill xmlns="" xmlns:a14="http://schemas.microsoft.com/office/drawing/2010/main">
+              <a14:hiddenFill xmlns:a14="http://schemas.microsoft.com/office/drawing/2010/main" xmlns="">
                 <a:noFill/>
               </a14:hiddenFill>
             </a:ext>
@@ -6226,7 +6226,7 @@
           </a:ln>
           <a:extLst>
             <a:ext uri="{909E8E84-426E-40dd-AFC4-6F175D3DCCD1}">
-              <a14:hiddenFill xmlns="" xmlns:a14="http://schemas.microsoft.com/office/drawing/2010/main">
+              <a14:hiddenFill xmlns:a14="http://schemas.microsoft.com/office/drawing/2010/main" xmlns="">
                 <a:noFill/>
               </a14:hiddenFill>
             </a:ext>
@@ -6267,7 +6267,7 @@
           </a:ln>
           <a:extLst>
             <a:ext uri="{909E8E84-426E-40dd-AFC4-6F175D3DCCD1}">
-              <a14:hiddenFill xmlns="" xmlns:a14="http://schemas.microsoft.com/office/drawing/2010/main">
+              <a14:hiddenFill xmlns:a14="http://schemas.microsoft.com/office/drawing/2010/main" xmlns="">
                 <a:noFill/>
               </a14:hiddenFill>
             </a:ext>
@@ -6308,7 +6308,7 @@
           </a:ln>
           <a:extLst>
             <a:ext uri="{909E8E84-426E-40dd-AFC4-6F175D3DCCD1}">
-              <a14:hiddenFill xmlns="" xmlns:a14="http://schemas.microsoft.com/office/drawing/2010/main">
+              <a14:hiddenFill xmlns:a14="http://schemas.microsoft.com/office/drawing/2010/main" xmlns="">
                 <a:noFill/>
               </a14:hiddenFill>
             </a:ext>
@@ -6349,7 +6349,7 @@
           </a:ln>
           <a:extLst>
             <a:ext uri="{909E8E84-426E-40dd-AFC4-6F175D3DCCD1}">
-              <a14:hiddenFill xmlns="" xmlns:a14="http://schemas.microsoft.com/office/drawing/2010/main">
+              <a14:hiddenFill xmlns:a14="http://schemas.microsoft.com/office/drawing/2010/main" xmlns="">
                 <a:noFill/>
               </a14:hiddenFill>
             </a:ext>
@@ -6465,7 +6465,7 @@
             </a:ln>
             <a:extLst>
               <a:ext uri="{91240B29-F687-4f45-9708-019B960494DF}">
-                <a14:hiddenLine xmlns="" xmlns:a14="http://schemas.microsoft.com/office/drawing/2010/main" w="12700">
+                <a14:hiddenLine xmlns:a14="http://schemas.microsoft.com/office/drawing/2010/main" xmlns="" w="12700">
                   <a:solidFill>
                     <a:schemeClr val="tx1"/>
                   </a:solidFill>
@@ -6609,7 +6609,7 @@
             </a:ln>
             <a:extLst>
               <a:ext uri="{91240B29-F687-4f45-9708-019B960494DF}">
-                <a14:hiddenLine xmlns="" xmlns:a14="http://schemas.microsoft.com/office/drawing/2010/main" w="12700">
+                <a14:hiddenLine xmlns:a14="http://schemas.microsoft.com/office/drawing/2010/main" xmlns="" w="12700">
                   <a:solidFill>
                     <a:schemeClr val="tx1"/>
                   </a:solidFill>
@@ -6753,14 +6753,14 @@
             </a:ln>
             <a:extLst>
               <a:ext uri="{909E8E84-426E-40dd-AFC4-6F175D3DCCD1}">
-                <a14:hiddenFill xmlns="" xmlns:a14="http://schemas.microsoft.com/office/drawing/2010/main">
+                <a14:hiddenFill xmlns:a14="http://schemas.microsoft.com/office/drawing/2010/main" xmlns="">
                   <a:solidFill>
                     <a:srgbClr val="FFFFFF"/>
                   </a:solidFill>
                 </a14:hiddenFill>
               </a:ext>
               <a:ext uri="{91240B29-F687-4f45-9708-019B960494DF}">
-                <a14:hiddenLine xmlns="" xmlns:a14="http://schemas.microsoft.com/office/drawing/2010/main" w="12700">
+                <a14:hiddenLine xmlns:a14="http://schemas.microsoft.com/office/drawing/2010/main" xmlns="" w="12700">
                   <a:solidFill>
                     <a:schemeClr val="tx1"/>
                   </a:solidFill>
@@ -6902,14 +6902,14 @@
             </a:ln>
             <a:extLst>
               <a:ext uri="{909E8E84-426E-40dd-AFC4-6F175D3DCCD1}">
-                <a14:hiddenFill xmlns="" xmlns:a14="http://schemas.microsoft.com/office/drawing/2010/main">
+                <a14:hiddenFill xmlns:a14="http://schemas.microsoft.com/office/drawing/2010/main" xmlns="">
                   <a:solidFill>
                     <a:srgbClr val="FFFFFF"/>
                   </a:solidFill>
                 </a14:hiddenFill>
               </a:ext>
               <a:ext uri="{91240B29-F687-4f45-9708-019B960494DF}">
-                <a14:hiddenLine xmlns="" xmlns:a14="http://schemas.microsoft.com/office/drawing/2010/main" w="12700">
+                <a14:hiddenLine xmlns:a14="http://schemas.microsoft.com/office/drawing/2010/main" xmlns="" w="12700">
                   <a:solidFill>
                     <a:schemeClr val="tx1"/>
                   </a:solidFill>
@@ -7051,14 +7051,14 @@
             </a:ln>
             <a:extLst>
               <a:ext uri="{909E8E84-426E-40dd-AFC4-6F175D3DCCD1}">
-                <a14:hiddenFill xmlns="" xmlns:a14="http://schemas.microsoft.com/office/drawing/2010/main">
+                <a14:hiddenFill xmlns:a14="http://schemas.microsoft.com/office/drawing/2010/main" xmlns="">
                   <a:solidFill>
                     <a:srgbClr val="FFFFFF"/>
                   </a:solidFill>
                 </a14:hiddenFill>
               </a:ext>
               <a:ext uri="{91240B29-F687-4f45-9708-019B960494DF}">
-                <a14:hiddenLine xmlns="" xmlns:a14="http://schemas.microsoft.com/office/drawing/2010/main" w="12700">
+                <a14:hiddenLine xmlns:a14="http://schemas.microsoft.com/office/drawing/2010/main" xmlns="" w="12700">
                   <a:solidFill>
                     <a:schemeClr val="tx1"/>
                   </a:solidFill>
@@ -15134,25 +15134,20 @@
             </a:r>
             <a:r>
               <a:rPr lang="en-HK" dirty="0"/>
-              <a:t>11:59:59 p.m., Sat, J</a:t>
+              <a:t>11:59:59 p.m., Sat, F</a:t>
             </a:r>
             <a:r>
               <a:rPr lang="en-US" altLang="zh-CN" dirty="0"/>
-              <a:t>an</a:t>
+              <a:t>eb</a:t>
             </a:r>
             <a:r>
               <a:rPr lang="en-HK" dirty="0"/>
               <a:t>. </a:t>
             </a:r>
             <a:r>
-              <a:rPr lang="en-US" altLang="zh-CN" dirty="0"/>
-              <a:t>25</a:t>
-            </a:r>
-            <a:r>
-              <a:rPr lang="en-HK" dirty="0" err="1"/>
-              <a:t>th</a:t>
-            </a:r>
-            <a:endParaRPr lang="en-US" dirty="0"/>
+              <a:rPr lang="en-US" dirty="0"/>
+              <a:t>1st</a:t>
+            </a:r>
           </a:p>
           <a:p>
             <a:r>

--- a/tutorial/T01/tut01.pptx
+++ b/tutorial/T01/tut01.pptx
@@ -222,7 +222,7 @@
           <a:p>
             <a:fld id="{3C0D143A-5D18-4912-9473-1905C04CDE60}" type="datetimeFigureOut">
               <a:rPr lang="en-HK" smtClean="0"/>
-              <a:t>31/8/2025</a:t>
+              <a:t>1/9/2025</a:t>
             </a:fld>
             <a:endParaRPr lang="en-HK"/>
           </a:p>
@@ -807,7 +807,7 @@
           <a:p>
             <a:fld id="{2425905D-C0C4-D040-B3F5-79CCA23FA4EB}" type="datetimeFigureOut">
               <a:rPr lang="en-US" smtClean="0"/>
-              <a:t>8/31/2025</a:t>
+              <a:t>9/1/2025</a:t>
             </a:fld>
             <a:endParaRPr lang="en-US"/>
           </a:p>
@@ -1007,7 +1007,7 @@
           <a:p>
             <a:fld id="{2425905D-C0C4-D040-B3F5-79CCA23FA4EB}" type="datetimeFigureOut">
               <a:rPr lang="en-US" smtClean="0"/>
-              <a:t>8/31/2025</a:t>
+              <a:t>9/1/2025</a:t>
             </a:fld>
             <a:endParaRPr lang="en-US"/>
           </a:p>
@@ -1217,7 +1217,7 @@
           <a:p>
             <a:fld id="{2425905D-C0C4-D040-B3F5-79CCA23FA4EB}" type="datetimeFigureOut">
               <a:rPr lang="en-US" smtClean="0"/>
-              <a:t>8/31/2025</a:t>
+              <a:t>9/1/2025</a:t>
             </a:fld>
             <a:endParaRPr lang="en-US"/>
           </a:p>
@@ -1417,7 +1417,7 @@
           <a:p>
             <a:fld id="{2425905D-C0C4-D040-B3F5-79CCA23FA4EB}" type="datetimeFigureOut">
               <a:rPr lang="en-US" smtClean="0"/>
-              <a:t>8/31/2025</a:t>
+              <a:t>9/1/2025</a:t>
             </a:fld>
             <a:endParaRPr lang="en-US"/>
           </a:p>
@@ -1693,7 +1693,7 @@
           <a:p>
             <a:fld id="{2425905D-C0C4-D040-B3F5-79CCA23FA4EB}" type="datetimeFigureOut">
               <a:rPr lang="en-US" smtClean="0"/>
-              <a:t>8/31/2025</a:t>
+              <a:t>9/1/2025</a:t>
             </a:fld>
             <a:endParaRPr lang="en-US"/>
           </a:p>
@@ -1961,7 +1961,7 @@
           <a:p>
             <a:fld id="{2425905D-C0C4-D040-B3F5-79CCA23FA4EB}" type="datetimeFigureOut">
               <a:rPr lang="en-US" smtClean="0"/>
-              <a:t>8/31/2025</a:t>
+              <a:t>9/1/2025</a:t>
             </a:fld>
             <a:endParaRPr lang="en-US"/>
           </a:p>
@@ -2376,7 +2376,7 @@
           <a:p>
             <a:fld id="{2425905D-C0C4-D040-B3F5-79CCA23FA4EB}" type="datetimeFigureOut">
               <a:rPr lang="en-US" smtClean="0"/>
-              <a:t>8/31/2025</a:t>
+              <a:t>9/1/2025</a:t>
             </a:fld>
             <a:endParaRPr lang="en-US"/>
           </a:p>
@@ -2518,7 +2518,7 @@
           <a:p>
             <a:fld id="{2425905D-C0C4-D040-B3F5-79CCA23FA4EB}" type="datetimeFigureOut">
               <a:rPr lang="en-US" smtClean="0"/>
-              <a:t>8/31/2025</a:t>
+              <a:t>9/1/2025</a:t>
             </a:fld>
             <a:endParaRPr lang="en-US"/>
           </a:p>
@@ -2631,7 +2631,7 @@
           <a:p>
             <a:fld id="{2425905D-C0C4-D040-B3F5-79CCA23FA4EB}" type="datetimeFigureOut">
               <a:rPr lang="en-US" smtClean="0"/>
-              <a:t>8/31/2025</a:t>
+              <a:t>9/1/2025</a:t>
             </a:fld>
             <a:endParaRPr lang="en-US"/>
           </a:p>
@@ -2944,7 +2944,7 @@
           <a:p>
             <a:fld id="{2425905D-C0C4-D040-B3F5-79CCA23FA4EB}" type="datetimeFigureOut">
               <a:rPr lang="en-US" smtClean="0"/>
-              <a:t>8/31/2025</a:t>
+              <a:t>9/1/2025</a:t>
             </a:fld>
             <a:endParaRPr lang="en-US"/>
           </a:p>
@@ -3233,7 +3233,7 @@
           <a:p>
             <a:fld id="{2425905D-C0C4-D040-B3F5-79CCA23FA4EB}" type="datetimeFigureOut">
               <a:rPr lang="en-US" smtClean="0"/>
-              <a:t>8/31/2025</a:t>
+              <a:t>9/1/2025</a:t>
             </a:fld>
             <a:endParaRPr lang="en-US"/>
           </a:p>
@@ -3476,7 +3476,7 @@
           <a:p>
             <a:fld id="{2425905D-C0C4-D040-B3F5-79CCA23FA4EB}" type="datetimeFigureOut">
               <a:rPr lang="en-US" smtClean="0"/>
-              <a:t>8/31/2025</a:t>
+              <a:t>9/1/2025</a:t>
             </a:fld>
             <a:endParaRPr lang="en-US"/>
           </a:p>
@@ -4202,7 +4202,7 @@
             </a:ln>
             <a:extLst>
               <a:ext uri="{91240B29-F687-4f45-9708-019B960494DF}">
-                <a14:hiddenLine xmlns="" xmlns:a14="http://schemas.microsoft.com/office/drawing/2010/main" w="12700">
+                <a14:hiddenLine xmlns:a14="http://schemas.microsoft.com/office/drawing/2010/main" xmlns="" w="12700">
                   <a:solidFill>
                     <a:schemeClr val="tx1"/>
                   </a:solidFill>
@@ -4346,7 +4346,7 @@
             </a:ln>
             <a:extLst>
               <a:ext uri="{91240B29-F687-4f45-9708-019B960494DF}">
-                <a14:hiddenLine xmlns="" xmlns:a14="http://schemas.microsoft.com/office/drawing/2010/main" w="12700">
+                <a14:hiddenLine xmlns:a14="http://schemas.microsoft.com/office/drawing/2010/main" xmlns="" w="12700">
                   <a:solidFill>
                     <a:schemeClr val="tx1"/>
                   </a:solidFill>
@@ -4490,7 +4490,7 @@
             </a:ln>
             <a:extLst>
               <a:ext uri="{91240B29-F687-4f45-9708-019B960494DF}">
-                <a14:hiddenLine xmlns="" xmlns:a14="http://schemas.microsoft.com/office/drawing/2010/main" w="12700">
+                <a14:hiddenLine xmlns:a14="http://schemas.microsoft.com/office/drawing/2010/main" xmlns="" w="12700">
                   <a:solidFill>
                     <a:schemeClr val="tx1"/>
                   </a:solidFill>
@@ -4634,7 +4634,7 @@
             </a:ln>
             <a:extLst>
               <a:ext uri="{91240B29-F687-4f45-9708-019B960494DF}">
-                <a14:hiddenLine xmlns="" xmlns:a14="http://schemas.microsoft.com/office/drawing/2010/main" w="12700">
+                <a14:hiddenLine xmlns:a14="http://schemas.microsoft.com/office/drawing/2010/main" xmlns="" w="12700">
                   <a:solidFill>
                     <a:schemeClr val="tx1"/>
                   </a:solidFill>
@@ -4778,14 +4778,14 @@
             </a:ln>
             <a:extLst>
               <a:ext uri="{909E8E84-426E-40dd-AFC4-6F175D3DCCD1}">
-                <a14:hiddenFill xmlns="" xmlns:a14="http://schemas.microsoft.com/office/drawing/2010/main">
+                <a14:hiddenFill xmlns:a14="http://schemas.microsoft.com/office/drawing/2010/main" xmlns="">
                   <a:solidFill>
                     <a:srgbClr val="FFFFFF"/>
                   </a:solidFill>
                 </a14:hiddenFill>
               </a:ext>
               <a:ext uri="{91240B29-F687-4f45-9708-019B960494DF}">
-                <a14:hiddenLine xmlns="" xmlns:a14="http://schemas.microsoft.com/office/drawing/2010/main" w="12700">
+                <a14:hiddenLine xmlns:a14="http://schemas.microsoft.com/office/drawing/2010/main" xmlns="" w="12700">
                   <a:solidFill>
                     <a:schemeClr val="tx1"/>
                   </a:solidFill>
@@ -4927,14 +4927,14 @@
             </a:ln>
             <a:extLst>
               <a:ext uri="{909E8E84-426E-40dd-AFC4-6F175D3DCCD1}">
-                <a14:hiddenFill xmlns="" xmlns:a14="http://schemas.microsoft.com/office/drawing/2010/main">
+                <a14:hiddenFill xmlns:a14="http://schemas.microsoft.com/office/drawing/2010/main" xmlns="">
                   <a:solidFill>
                     <a:srgbClr val="FFFFFF"/>
                   </a:solidFill>
                 </a14:hiddenFill>
               </a:ext>
               <a:ext uri="{91240B29-F687-4f45-9708-019B960494DF}">
-                <a14:hiddenLine xmlns="" xmlns:a14="http://schemas.microsoft.com/office/drawing/2010/main" w="12700">
+                <a14:hiddenLine xmlns:a14="http://schemas.microsoft.com/office/drawing/2010/main" xmlns="" w="12700">
                   <a:solidFill>
                     <a:schemeClr val="tx1"/>
                   </a:solidFill>
@@ -5076,14 +5076,14 @@
             </a:ln>
             <a:extLst>
               <a:ext uri="{909E8E84-426E-40dd-AFC4-6F175D3DCCD1}">
-                <a14:hiddenFill xmlns="" xmlns:a14="http://schemas.microsoft.com/office/drawing/2010/main">
+                <a14:hiddenFill xmlns:a14="http://schemas.microsoft.com/office/drawing/2010/main" xmlns="">
                   <a:solidFill>
                     <a:srgbClr val="FFFFFF"/>
                   </a:solidFill>
                 </a14:hiddenFill>
               </a:ext>
               <a:ext uri="{91240B29-F687-4f45-9708-019B960494DF}">
-                <a14:hiddenLine xmlns="" xmlns:a14="http://schemas.microsoft.com/office/drawing/2010/main" w="12700">
+                <a14:hiddenLine xmlns:a14="http://schemas.microsoft.com/office/drawing/2010/main" xmlns="" w="12700">
                   <a:solidFill>
                     <a:schemeClr val="tx1"/>
                   </a:solidFill>
@@ -5355,7 +5355,7 @@
           </a:ln>
           <a:extLst>
             <a:ext uri="{909E8E84-426E-40dd-AFC4-6F175D3DCCD1}">
-              <a14:hiddenFill xmlns="" xmlns:a14="http://schemas.microsoft.com/office/drawing/2010/main">
+              <a14:hiddenFill xmlns:a14="http://schemas.microsoft.com/office/drawing/2010/main" xmlns="">
                 <a:noFill/>
               </a14:hiddenFill>
             </a:ext>
@@ -5396,7 +5396,7 @@
           </a:ln>
           <a:extLst>
             <a:ext uri="{909E8E84-426E-40dd-AFC4-6F175D3DCCD1}">
-              <a14:hiddenFill xmlns="" xmlns:a14="http://schemas.microsoft.com/office/drawing/2010/main">
+              <a14:hiddenFill xmlns:a14="http://schemas.microsoft.com/office/drawing/2010/main" xmlns="">
                 <a:noFill/>
               </a14:hiddenFill>
             </a:ext>
@@ -5437,7 +5437,7 @@
           </a:ln>
           <a:extLst>
             <a:ext uri="{909E8E84-426E-40dd-AFC4-6F175D3DCCD1}">
-              <a14:hiddenFill xmlns="" xmlns:a14="http://schemas.microsoft.com/office/drawing/2010/main">
+              <a14:hiddenFill xmlns:a14="http://schemas.microsoft.com/office/drawing/2010/main" xmlns="">
                 <a:noFill/>
               </a14:hiddenFill>
             </a:ext>
@@ -5478,7 +5478,7 @@
           </a:ln>
           <a:extLst>
             <a:ext uri="{909E8E84-426E-40dd-AFC4-6F175D3DCCD1}">
-              <a14:hiddenFill xmlns="" xmlns:a14="http://schemas.microsoft.com/office/drawing/2010/main">
+              <a14:hiddenFill xmlns:a14="http://schemas.microsoft.com/office/drawing/2010/main" xmlns="">
                 <a:noFill/>
               </a14:hiddenFill>
             </a:ext>
@@ -5519,7 +5519,7 @@
           </a:ln>
           <a:extLst>
             <a:ext uri="{909E8E84-426E-40dd-AFC4-6F175D3DCCD1}">
-              <a14:hiddenFill xmlns="" xmlns:a14="http://schemas.microsoft.com/office/drawing/2010/main">
+              <a14:hiddenFill xmlns:a14="http://schemas.microsoft.com/office/drawing/2010/main" xmlns="">
                 <a:noFill/>
               </a14:hiddenFill>
             </a:ext>
@@ -5635,7 +5635,7 @@
             </a:ln>
             <a:extLst>
               <a:ext uri="{91240B29-F687-4f45-9708-019B960494DF}">
-                <a14:hiddenLine xmlns="" xmlns:a14="http://schemas.microsoft.com/office/drawing/2010/main" w="12700">
+                <a14:hiddenLine xmlns:a14="http://schemas.microsoft.com/office/drawing/2010/main" xmlns="" w="12700">
                   <a:solidFill>
                     <a:schemeClr val="tx1"/>
                   </a:solidFill>
@@ -5779,7 +5779,7 @@
             </a:ln>
             <a:extLst>
               <a:ext uri="{91240B29-F687-4f45-9708-019B960494DF}">
-                <a14:hiddenLine xmlns="" xmlns:a14="http://schemas.microsoft.com/office/drawing/2010/main" w="12700">
+                <a14:hiddenLine xmlns:a14="http://schemas.microsoft.com/office/drawing/2010/main" xmlns="" w="12700">
                   <a:solidFill>
                     <a:schemeClr val="tx1"/>
                   </a:solidFill>
@@ -5923,14 +5923,14 @@
             </a:ln>
             <a:extLst>
               <a:ext uri="{909E8E84-426E-40dd-AFC4-6F175D3DCCD1}">
-                <a14:hiddenFill xmlns="" xmlns:a14="http://schemas.microsoft.com/office/drawing/2010/main">
+                <a14:hiddenFill xmlns:a14="http://schemas.microsoft.com/office/drawing/2010/main" xmlns="">
                   <a:solidFill>
                     <a:srgbClr val="FFFFFF"/>
                   </a:solidFill>
                 </a14:hiddenFill>
               </a:ext>
               <a:ext uri="{91240B29-F687-4f45-9708-019B960494DF}">
-                <a14:hiddenLine xmlns="" xmlns:a14="http://schemas.microsoft.com/office/drawing/2010/main" w="12700">
+                <a14:hiddenLine xmlns:a14="http://schemas.microsoft.com/office/drawing/2010/main" xmlns="" w="12700">
                   <a:solidFill>
                     <a:schemeClr val="tx1"/>
                   </a:solidFill>
@@ -6072,14 +6072,14 @@
             </a:ln>
             <a:extLst>
               <a:ext uri="{909E8E84-426E-40dd-AFC4-6F175D3DCCD1}">
-                <a14:hiddenFill xmlns="" xmlns:a14="http://schemas.microsoft.com/office/drawing/2010/main">
+                <a14:hiddenFill xmlns:a14="http://schemas.microsoft.com/office/drawing/2010/main" xmlns="">
                   <a:solidFill>
                     <a:srgbClr val="FFFFFF"/>
                   </a:solidFill>
                 </a14:hiddenFill>
               </a:ext>
               <a:ext uri="{91240B29-F687-4f45-9708-019B960494DF}">
-                <a14:hiddenLine xmlns="" xmlns:a14="http://schemas.microsoft.com/office/drawing/2010/main" w="12700">
+                <a14:hiddenLine xmlns:a14="http://schemas.microsoft.com/office/drawing/2010/main" xmlns="" w="12700">
                   <a:solidFill>
                     <a:schemeClr val="tx1"/>
                   </a:solidFill>
@@ -6221,14 +6221,14 @@
             </a:ln>
             <a:extLst>
               <a:ext uri="{909E8E84-426E-40dd-AFC4-6F175D3DCCD1}">
-                <a14:hiddenFill xmlns="" xmlns:a14="http://schemas.microsoft.com/office/drawing/2010/main">
+                <a14:hiddenFill xmlns:a14="http://schemas.microsoft.com/office/drawing/2010/main" xmlns="">
                   <a:solidFill>
                     <a:srgbClr val="FFFFFF"/>
                   </a:solidFill>
                 </a14:hiddenFill>
               </a:ext>
               <a:ext uri="{91240B29-F687-4f45-9708-019B960494DF}">
-                <a14:hiddenLine xmlns="" xmlns:a14="http://schemas.microsoft.com/office/drawing/2010/main" w="12700">
+                <a14:hiddenLine xmlns:a14="http://schemas.microsoft.com/office/drawing/2010/main" xmlns="" w="12700">
                   <a:solidFill>
                     <a:schemeClr val="tx1"/>
                   </a:solidFill>
